--- a/neerlandais1/powerpoints/Module_16_De_gebiedende_wijs.pptx
+++ b/neerlandais1/powerpoints/Module_16_De_gebiedende_wijs.pptx
@@ -134,18 +134,18 @@
   <p:extLst>
     <p:ext uri="{521415D9-36F7-43E2-AB2F-B90AF26B5E84}">
       <p14:sectionLst xmlns:p14="http://schemas.microsoft.com/office/powerpoint/2010/main">
-        <p14:section name="Ouverture" id="{4b75a3c4-2129-e5b5-08db-fc3334fcf253}">
+        <p14:section name="Ouverture" id="{5bdfce71-a179-b81e-ae28-89132bd2aa48}">
           <p14:sldIdLst>
             <p14:sldId id="256"/>
           </p14:sldIdLst>
         </p14:section>
-        <p14:section name="Découvrir" id="{4735c1e4-c746-3864-6d0b-ec9f94ac29b0}">
+        <p14:section name="Découvrir" id="{137e013f-13e7-fe51-d905-a37969f3b979}">
           <p14:sldIdLst>
             <p14:sldId id="257"/>
             <p14:sldId id="258"/>
           </p14:sldIdLst>
         </p14:section>
-        <p14:section name="Comprendre" id="{897559d0-a3d0-2c5c-1b24-b04dcb2163a6}">
+        <p14:section name="Comprendre" id="{fc6033db-07d3-b926-2406-bc82889703e2}">
           <p14:sldIdLst>
             <p14:sldId id="259"/>
             <p14:sldId id="260"/>
@@ -160,7 +160,7 @@
             <p14:sldId id="269"/>
           </p14:sldIdLst>
         </p14:section>
-        <p14:section name="JIJ NU ! — Oefeningen" id="{0b0d3318-eb06-b77c-9f27-74fb772bf4cd}">
+        <p14:section name="JIJ NU ! — Oefeningen" id="{a16263d1-b9c4-9766-ddbf-3f2c6fb98320}">
           <p14:sldIdLst>
             <p14:sldId id="270"/>
             <p14:sldId id="271"/>
@@ -177,7 +177,7 @@
             <p14:sldId id="282"/>
           </p14:sldIdLst>
         </p14:section>
-        <p14:section name="Clôture" id="{c41784b3-eb67-bc72-abfd-ff6bd17951f1}">
+        <p14:section name="Clôture" id="{6f1dc2a7-ae16-2dc5-ad1d-8123485b3a1c}">
           <p14:sldIdLst>
             <p14:sldId id="283"/>
           </p14:sldIdLst>
@@ -3897,7 +3897,7 @@
                   <a:srgbClr val="FFFFFF"/>
                 </a:solidFill>
               </a:rPr>
-              <a:t>MODULE 16 / 19</a:t>
+              <a:t>MODULE 16 / 24</a:t>
             </a:r>
             <a:endParaRPr lang="en-US" sz="1400" dirty="0"/>
           </a:p>

--- a/neerlandais1/powerpoints/Module_16_De_gebiedende_wijs.pptx
+++ b/neerlandais1/powerpoints/Module_16_De_gebiedende_wijs.pptx
@@ -134,18 +134,18 @@
   <p:extLst>
     <p:ext uri="{521415D9-36F7-43E2-AB2F-B90AF26B5E84}">
       <p14:sectionLst xmlns:p14="http://schemas.microsoft.com/office/powerpoint/2010/main">
-        <p14:section name="Ouverture" id="{5bdfce71-a179-b81e-ae28-89132bd2aa48}">
+        <p14:section name="Ouverture" id="{d4203281-221d-1312-09cb-a192483e72c3}">
           <p14:sldIdLst>
             <p14:sldId id="256"/>
           </p14:sldIdLst>
         </p14:section>
-        <p14:section name="Découvrir" id="{137e013f-13e7-fe51-d905-a37969f3b979}">
+        <p14:section name="Découvrir" id="{55505461-3fa0-a254-c6a2-6e2cd0f6b0dc}">
           <p14:sldIdLst>
             <p14:sldId id="257"/>
             <p14:sldId id="258"/>
           </p14:sldIdLst>
         </p14:section>
-        <p14:section name="Comprendre" id="{fc6033db-07d3-b926-2406-bc82889703e2}">
+        <p14:section name="Comprendre" id="{7af15147-ad1c-b17e-2a63-c798fdc25590}">
           <p14:sldIdLst>
             <p14:sldId id="259"/>
             <p14:sldId id="260"/>
@@ -160,7 +160,7 @@
             <p14:sldId id="269"/>
           </p14:sldIdLst>
         </p14:section>
-        <p14:section name="JIJ NU ! — Oefeningen" id="{a16263d1-b9c4-9766-ddbf-3f2c6fb98320}">
+        <p14:section name="JIJ NU ! — Oefeningen" id="{ae20115b-6b9d-0e6b-27fa-e75688212dfc}">
           <p14:sldIdLst>
             <p14:sldId id="270"/>
             <p14:sldId id="271"/>
@@ -177,7 +177,7 @@
             <p14:sldId id="282"/>
           </p14:sldIdLst>
         </p14:section>
-        <p14:section name="Clôture" id="{6f1dc2a7-ae16-2dc5-ad1d-8123485b3a1c}">
+        <p14:section name="Clôture" id="{d8d7cc9a-53ad-442e-b0a7-caa766afcd70}">
           <p14:sldIdLst>
             <p14:sldId id="283"/>
           </p14:sldIdLst>
@@ -2999,7 +2999,7 @@
             <a:r>
               <a:rPr lang="en-US" dirty="0"/>
               <a:t>Objectif : Choisir le degré de politesse adapté à la situation.
-L'impératif n'est pas impoli en soi : avec maar, even ou alstublieft, c'est une invitation. La marche ⑤ utilise zou (le conditionnel, Néerlandais 2) : à reconnaître seulement. À l'accueil ou au téléphone, la marche ③ suffit.</a:t>
+L'impératif n'est pas impoli en soi : avec maar, even ou alstublieft, c'est une invitation. La marche ⑤ utilise zou (le conditionnel, travaillé au M29) : à reconnaître seulement. À l'accueil ou au téléphone, la marche ③ suffit.</a:t>
             </a:r>
             <a:endParaRPr lang="en-US" dirty="0"/>
           </a:p>
@@ -3897,7 +3897,7 @@
                   <a:srgbClr val="FFFFFF"/>
                 </a:solidFill>
               </a:rPr>
-              <a:t>MODULE 16 / 24</a:t>
+              <a:t>MODULE 16 / 29</a:t>
             </a:r>
             <a:endParaRPr lang="en-US" sz="1400" dirty="0"/>
           </a:p>

--- a/neerlandais1/powerpoints/Module_16_De_gebiedende_wijs.pptx
+++ b/neerlandais1/powerpoints/Module_16_De_gebiedende_wijs.pptx
@@ -134,18 +134,18 @@
   <p:extLst>
     <p:ext uri="{521415D9-36F7-43E2-AB2F-B90AF26B5E84}">
       <p14:sectionLst xmlns:p14="http://schemas.microsoft.com/office/powerpoint/2010/main">
-        <p14:section name="Ouverture" id="{d4203281-221d-1312-09cb-a192483e72c3}">
+        <p14:section name="Ouverture" id="{733f347c-43d8-03e3-693b-40f6cf9631e4}">
           <p14:sldIdLst>
             <p14:sldId id="256"/>
           </p14:sldIdLst>
         </p14:section>
-        <p14:section name="Découvrir" id="{55505461-3fa0-a254-c6a2-6e2cd0f6b0dc}">
+        <p14:section name="Découvrir" id="{d48eb4ee-f96c-5d28-9768-5b2c5461c3e2}">
           <p14:sldIdLst>
             <p14:sldId id="257"/>
             <p14:sldId id="258"/>
           </p14:sldIdLst>
         </p14:section>
-        <p14:section name="Comprendre" id="{7af15147-ad1c-b17e-2a63-c798fdc25590}">
+        <p14:section name="Comprendre" id="{3ab29afe-80b3-61fd-8914-2f2a74d7e2af}">
           <p14:sldIdLst>
             <p14:sldId id="259"/>
             <p14:sldId id="260"/>
@@ -160,7 +160,7 @@
             <p14:sldId id="269"/>
           </p14:sldIdLst>
         </p14:section>
-        <p14:section name="JIJ NU ! — Oefeningen" id="{ae20115b-6b9d-0e6b-27fa-e75688212dfc}">
+        <p14:section name="JIJ NU ! — Oefeningen" id="{8149ccea-9c43-1f7c-5f68-b28cc055205f}">
           <p14:sldIdLst>
             <p14:sldId id="270"/>
             <p14:sldId id="271"/>
@@ -177,7 +177,7 @@
             <p14:sldId id="282"/>
           </p14:sldIdLst>
         </p14:section>
-        <p14:section name="Clôture" id="{d8d7cc9a-53ad-442e-b0a7-caa766afcd70}">
+        <p14:section name="Clôture" id="{078050cd-e8f6-b239-e7fc-10fb47b5bdf6}">
           <p14:sldIdLst>
             <p14:sldId id="283"/>
           </p14:sldIdLst>
@@ -3897,7 +3897,7 @@
                   <a:srgbClr val="FFFFFF"/>
                 </a:solidFill>
               </a:rPr>
-              <a:t>MODULE 16 / 29</a:t>
+              <a:t>MODULE 16 / 32</a:t>
             </a:r>
             <a:endParaRPr lang="en-US" sz="1400" dirty="0"/>
           </a:p>

--- a/neerlandais1/powerpoints/Module_16_De_gebiedende_wijs.pptx
+++ b/neerlandais1/powerpoints/Module_16_De_gebiedende_wijs.pptx
@@ -134,18 +134,18 @@
   <p:extLst>
     <p:ext uri="{521415D9-36F7-43E2-AB2F-B90AF26B5E84}">
       <p14:sectionLst xmlns:p14="http://schemas.microsoft.com/office/powerpoint/2010/main">
-        <p14:section name="Ouverture" id="{733f347c-43d8-03e3-693b-40f6cf9631e4}">
+        <p14:section name="Ouverture" id="{af21e8f3-cab2-1035-ae9c-12c665b4a1c5}">
           <p14:sldIdLst>
             <p14:sldId id="256"/>
           </p14:sldIdLst>
         </p14:section>
-        <p14:section name="Découvrir" id="{d48eb4ee-f96c-5d28-9768-5b2c5461c3e2}">
+        <p14:section name="Découvrir" id="{7841bdf4-3386-70d4-0600-f7dfa853c78d}">
           <p14:sldIdLst>
             <p14:sldId id="257"/>
             <p14:sldId id="258"/>
           </p14:sldIdLst>
         </p14:section>
-        <p14:section name="Comprendre" id="{3ab29afe-80b3-61fd-8914-2f2a74d7e2af}">
+        <p14:section name="Comprendre" id="{f169b5b6-c205-2931-6b6b-063a4401fe24}">
           <p14:sldIdLst>
             <p14:sldId id="259"/>
             <p14:sldId id="260"/>
@@ -160,7 +160,7 @@
             <p14:sldId id="269"/>
           </p14:sldIdLst>
         </p14:section>
-        <p14:section name="JIJ NU ! — Oefeningen" id="{8149ccea-9c43-1f7c-5f68-b28cc055205f}">
+        <p14:section name="JIJ NU ! — Oefeningen" id="{5a4256b5-2e3f-7ef9-6977-132439baec0e}">
           <p14:sldIdLst>
             <p14:sldId id="270"/>
             <p14:sldId id="271"/>
@@ -177,7 +177,7 @@
             <p14:sldId id="282"/>
           </p14:sldIdLst>
         </p14:section>
-        <p14:section name="Clôture" id="{078050cd-e8f6-b239-e7fc-10fb47b5bdf6}">
+        <p14:section name="Clôture" id="{a05fa044-213a-060d-5755-969409dac26f}">
           <p14:sldIdLst>
             <p14:sldId id="283"/>
           </p14:sldIdLst>

--- a/neerlandais1/powerpoints/Module_16_De_gebiedende_wijs.pptx
+++ b/neerlandais1/powerpoints/Module_16_De_gebiedende_wijs.pptx
@@ -134,18 +134,18 @@
   <p:extLst>
     <p:ext uri="{521415D9-36F7-43E2-AB2F-B90AF26B5E84}">
       <p14:sectionLst xmlns:p14="http://schemas.microsoft.com/office/powerpoint/2010/main">
-        <p14:section name="Ouverture" id="{af21e8f3-cab2-1035-ae9c-12c665b4a1c5}">
+        <p14:section name="Ouverture" id="{c029a73d-dc6c-0f13-93da-8507f541e5f2}">
           <p14:sldIdLst>
             <p14:sldId id="256"/>
           </p14:sldIdLst>
         </p14:section>
-        <p14:section name="Découvrir" id="{7841bdf4-3386-70d4-0600-f7dfa853c78d}">
+        <p14:section name="Découvrir" id="{5e4546a7-09e8-2720-3c4f-fc9a5ae23c4f}">
           <p14:sldIdLst>
             <p14:sldId id="257"/>
             <p14:sldId id="258"/>
           </p14:sldIdLst>
         </p14:section>
-        <p14:section name="Comprendre" id="{f169b5b6-c205-2931-6b6b-063a4401fe24}">
+        <p14:section name="Comprendre" id="{572fe356-7e3c-4aab-89e8-0bbf31478129}">
           <p14:sldIdLst>
             <p14:sldId id="259"/>
             <p14:sldId id="260"/>
@@ -160,7 +160,7 @@
             <p14:sldId id="269"/>
           </p14:sldIdLst>
         </p14:section>
-        <p14:section name="JIJ NU ! — Oefeningen" id="{5a4256b5-2e3f-7ef9-6977-132439baec0e}">
+        <p14:section name="JIJ NU ! — Oefeningen" id="{7076540d-a61b-8cb3-3ae3-76a916373a80}">
           <p14:sldIdLst>
             <p14:sldId id="270"/>
             <p14:sldId id="271"/>
@@ -177,7 +177,7 @@
             <p14:sldId id="282"/>
           </p14:sldIdLst>
         </p14:section>
-        <p14:section name="Clôture" id="{a05fa044-213a-060d-5755-969409dac26f}">
+        <p14:section name="Clôture" id="{197b8e4e-84b4-ab48-dfbb-ee1ff688f102}">
           <p14:sldIdLst>
             <p14:sldId id="283"/>
           </p14:sldIdLst>

--- a/neerlandais1/powerpoints/Module_16_De_gebiedende_wijs.pptx
+++ b/neerlandais1/powerpoints/Module_16_De_gebiedende_wijs.pptx
@@ -134,18 +134,18 @@
   <p:extLst>
     <p:ext uri="{521415D9-36F7-43E2-AB2F-B90AF26B5E84}">
       <p14:sectionLst xmlns:p14="http://schemas.microsoft.com/office/powerpoint/2010/main">
-        <p14:section name="Ouverture" id="{c029a73d-dc6c-0f13-93da-8507f541e5f2}">
+        <p14:section name="Ouverture" id="{381135ee-590d-37be-fc19-58b68fd82c82}">
           <p14:sldIdLst>
             <p14:sldId id="256"/>
           </p14:sldIdLst>
         </p14:section>
-        <p14:section name="Découvrir" id="{5e4546a7-09e8-2720-3c4f-fc9a5ae23c4f}">
+        <p14:section name="Découvrir" id="{639e6d59-89db-1144-1120-217e6663913e}">
           <p14:sldIdLst>
             <p14:sldId id="257"/>
             <p14:sldId id="258"/>
           </p14:sldIdLst>
         </p14:section>
-        <p14:section name="Comprendre" id="{572fe356-7e3c-4aab-89e8-0bbf31478129}">
+        <p14:section name="Comprendre" id="{f657bc80-2481-3fee-2676-ae355f4b225d}">
           <p14:sldIdLst>
             <p14:sldId id="259"/>
             <p14:sldId id="260"/>
@@ -160,7 +160,7 @@
             <p14:sldId id="269"/>
           </p14:sldIdLst>
         </p14:section>
-        <p14:section name="JIJ NU ! — Oefeningen" id="{7076540d-a61b-8cb3-3ae3-76a916373a80}">
+        <p14:section name="JIJ NU ! — Oefeningen" id="{91587c59-a720-5162-9732-ea880e3a147b}">
           <p14:sldIdLst>
             <p14:sldId id="270"/>
             <p14:sldId id="271"/>
@@ -177,7 +177,7 @@
             <p14:sldId id="282"/>
           </p14:sldIdLst>
         </p14:section>
-        <p14:section name="Clôture" id="{197b8e4e-84b4-ab48-dfbb-ee1ff688f102}">
+        <p14:section name="Clôture" id="{0e0acf69-db6f-bd58-789d-76c7d8ee98a6}">
           <p14:sldIdLst>
             <p14:sldId id="283"/>
           </p14:sldIdLst>

--- a/neerlandais1/powerpoints/Module_16_De_gebiedende_wijs.pptx
+++ b/neerlandais1/powerpoints/Module_16_De_gebiedende_wijs.pptx
@@ -134,18 +134,18 @@
   <p:extLst>
     <p:ext uri="{521415D9-36F7-43E2-AB2F-B90AF26B5E84}">
       <p14:sectionLst xmlns:p14="http://schemas.microsoft.com/office/powerpoint/2010/main">
-        <p14:section name="Ouverture" id="{381135ee-590d-37be-fc19-58b68fd82c82}">
+        <p14:section name="Ouverture" id="{a2d681ae-0ff5-e83b-158f-3ec2a0bc4555}">
           <p14:sldIdLst>
             <p14:sldId id="256"/>
           </p14:sldIdLst>
         </p14:section>
-        <p14:section name="Découvrir" id="{639e6d59-89db-1144-1120-217e6663913e}">
+        <p14:section name="Découvrir" id="{de139622-fa0b-7b7f-630a-6849384f914c}">
           <p14:sldIdLst>
             <p14:sldId id="257"/>
             <p14:sldId id="258"/>
           </p14:sldIdLst>
         </p14:section>
-        <p14:section name="Comprendre" id="{f657bc80-2481-3fee-2676-ae355f4b225d}">
+        <p14:section name="Comprendre" id="{fe66a8ca-2331-94c7-4f62-de401b70fba4}">
           <p14:sldIdLst>
             <p14:sldId id="259"/>
             <p14:sldId id="260"/>
@@ -160,7 +160,7 @@
             <p14:sldId id="269"/>
           </p14:sldIdLst>
         </p14:section>
-        <p14:section name="JIJ NU ! — Oefeningen" id="{91587c59-a720-5162-9732-ea880e3a147b}">
+        <p14:section name="JIJ NU ! — Oefeningen" id="{cedfbaa5-fd1a-2086-4d7d-440b5e4aacc6}">
           <p14:sldIdLst>
             <p14:sldId id="270"/>
             <p14:sldId id="271"/>
@@ -177,7 +177,7 @@
             <p14:sldId id="282"/>
           </p14:sldIdLst>
         </p14:section>
-        <p14:section name="Clôture" id="{0e0acf69-db6f-bd58-789d-76c7d8ee98a6}">
+        <p14:section name="Clôture" id="{b75b0278-0ef4-e2a7-7511-36635d479365}">
           <p14:sldIdLst>
             <p14:sldId id="283"/>
           </p14:sldIdLst>

--- a/neerlandais1/powerpoints/Module_16_De_gebiedende_wijs.pptx
+++ b/neerlandais1/powerpoints/Module_16_De_gebiedende_wijs.pptx
@@ -134,18 +134,18 @@
   <p:extLst>
     <p:ext uri="{521415D9-36F7-43E2-AB2F-B90AF26B5E84}">
       <p14:sectionLst xmlns:p14="http://schemas.microsoft.com/office/powerpoint/2010/main">
-        <p14:section name="Ouverture" id="{a2d681ae-0ff5-e83b-158f-3ec2a0bc4555}">
+        <p14:section name="Ouverture" id="{7de965be-b996-f260-ff4c-780875fdf87d}">
           <p14:sldIdLst>
             <p14:sldId id="256"/>
           </p14:sldIdLst>
         </p14:section>
-        <p14:section name="Découvrir" id="{de139622-fa0b-7b7f-630a-6849384f914c}">
+        <p14:section name="Découvrir" id="{4281e53b-923d-cb8e-a9c0-0dfa7e5138a3}">
           <p14:sldIdLst>
             <p14:sldId id="257"/>
             <p14:sldId id="258"/>
           </p14:sldIdLst>
         </p14:section>
-        <p14:section name="Comprendre" id="{fe66a8ca-2331-94c7-4f62-de401b70fba4}">
+        <p14:section name="Comprendre" id="{8d6b4b28-5d4a-503e-7b38-0bb08310ec63}">
           <p14:sldIdLst>
             <p14:sldId id="259"/>
             <p14:sldId id="260"/>
@@ -160,7 +160,7 @@
             <p14:sldId id="269"/>
           </p14:sldIdLst>
         </p14:section>
-        <p14:section name="JIJ NU ! — Oefeningen" id="{cedfbaa5-fd1a-2086-4d7d-440b5e4aacc6}">
+        <p14:section name="JIJ NU ! — Oefeningen" id="{133ce69f-6d5f-f373-49f0-efbd056dfbd8}">
           <p14:sldIdLst>
             <p14:sldId id="270"/>
             <p14:sldId id="271"/>
@@ -177,7 +177,7 @@
             <p14:sldId id="282"/>
           </p14:sldIdLst>
         </p14:section>
-        <p14:section name="Clôture" id="{b75b0278-0ef4-e2a7-7511-36635d479365}">
+        <p14:section name="Clôture" id="{d4b9a898-d84e-ee1e-bb64-1bc900638503}">
           <p14:sldIdLst>
             <p14:sldId id="283"/>
           </p14:sldIdLst>

--- a/neerlandais1/powerpoints/Module_16_De_gebiedende_wijs.pptx
+++ b/neerlandais1/powerpoints/Module_16_De_gebiedende_wijs.pptx
@@ -134,18 +134,18 @@
   <p:extLst>
     <p:ext uri="{521415D9-36F7-43E2-AB2F-B90AF26B5E84}">
       <p14:sectionLst xmlns:p14="http://schemas.microsoft.com/office/powerpoint/2010/main">
-        <p14:section name="Ouverture" id="{7de965be-b996-f260-ff4c-780875fdf87d}">
+        <p14:section name="Ouverture" id="{d6c71a9c-35a2-427c-1a39-a92d498a6c4e}">
           <p14:sldIdLst>
             <p14:sldId id="256"/>
           </p14:sldIdLst>
         </p14:section>
-        <p14:section name="Découvrir" id="{4281e53b-923d-cb8e-a9c0-0dfa7e5138a3}">
+        <p14:section name="Découvrir" id="{6991e355-4bf4-9167-3791-8edaa4f425e1}">
           <p14:sldIdLst>
             <p14:sldId id="257"/>
             <p14:sldId id="258"/>
           </p14:sldIdLst>
         </p14:section>
-        <p14:section name="Comprendre" id="{8d6b4b28-5d4a-503e-7b38-0bb08310ec63}">
+        <p14:section name="Comprendre" id="{89b1b11e-5c32-ae52-4928-88b711d624ba}">
           <p14:sldIdLst>
             <p14:sldId id="259"/>
             <p14:sldId id="260"/>
@@ -160,7 +160,7 @@
             <p14:sldId id="269"/>
           </p14:sldIdLst>
         </p14:section>
-        <p14:section name="JIJ NU ! — Oefeningen" id="{133ce69f-6d5f-f373-49f0-efbd056dfbd8}">
+        <p14:section name="JIJ NU ! — Oefeningen" id="{829cfab4-5fd9-90e1-eb91-9ed6e9eefc1b}">
           <p14:sldIdLst>
             <p14:sldId id="270"/>
             <p14:sldId id="271"/>
@@ -177,7 +177,7 @@
             <p14:sldId id="282"/>
           </p14:sldIdLst>
         </p14:section>
-        <p14:section name="Clôture" id="{d4b9a898-d84e-ee1e-bb64-1bc900638503}">
+        <p14:section name="Clôture" id="{c827e4f8-f045-ac77-20e7-d215ac17f2e3}">
           <p14:sldIdLst>
             <p14:sldId id="283"/>
           </p14:sldIdLst>

--- a/neerlandais1/powerpoints/Module_16_De_gebiedende_wijs.pptx
+++ b/neerlandais1/powerpoints/Module_16_De_gebiedende_wijs.pptx
@@ -134,18 +134,18 @@
   <p:extLst>
     <p:ext uri="{521415D9-36F7-43E2-AB2F-B90AF26B5E84}">
       <p14:sectionLst xmlns:p14="http://schemas.microsoft.com/office/powerpoint/2010/main">
-        <p14:section name="Ouverture" id="{d6c71a9c-35a2-427c-1a39-a92d498a6c4e}">
+        <p14:section name="Ouverture" id="{8199beb8-673a-7d54-290a-7241b780232f}">
           <p14:sldIdLst>
             <p14:sldId id="256"/>
           </p14:sldIdLst>
         </p14:section>
-        <p14:section name="Découvrir" id="{6991e355-4bf4-9167-3791-8edaa4f425e1}">
+        <p14:section name="Découvrir" id="{58c7b21d-974d-8590-423a-e0e581b29d56}">
           <p14:sldIdLst>
             <p14:sldId id="257"/>
             <p14:sldId id="258"/>
           </p14:sldIdLst>
         </p14:section>
-        <p14:section name="Comprendre" id="{89b1b11e-5c32-ae52-4928-88b711d624ba}">
+        <p14:section name="Comprendre" id="{e487cfb1-38b0-6c1f-fa88-3072ab892f34}">
           <p14:sldIdLst>
             <p14:sldId id="259"/>
             <p14:sldId id="260"/>
@@ -160,7 +160,7 @@
             <p14:sldId id="269"/>
           </p14:sldIdLst>
         </p14:section>
-        <p14:section name="JIJ NU ! — Oefeningen" id="{829cfab4-5fd9-90e1-eb91-9ed6e9eefc1b}">
+        <p14:section name="JIJ NU ! — Oefeningen" id="{188f9ded-916e-aaa7-beb6-e1599bfdb9e6}">
           <p14:sldIdLst>
             <p14:sldId id="270"/>
             <p14:sldId id="271"/>
@@ -177,7 +177,7 @@
             <p14:sldId id="282"/>
           </p14:sldIdLst>
         </p14:section>
-        <p14:section name="Clôture" id="{c827e4f8-f045-ac77-20e7-d215ac17f2e3}">
+        <p14:section name="Clôture" id="{87d85cc1-71cf-46e5-d114-31e4cd3f4073}">
           <p14:sldIdLst>
             <p14:sldId id="283"/>
           </p14:sldIdLst>

--- a/neerlandais1/powerpoints/Module_16_De_gebiedende_wijs.pptx
+++ b/neerlandais1/powerpoints/Module_16_De_gebiedende_wijs.pptx
@@ -134,18 +134,18 @@
   <p:extLst>
     <p:ext uri="{521415D9-36F7-43E2-AB2F-B90AF26B5E84}">
       <p14:sectionLst xmlns:p14="http://schemas.microsoft.com/office/powerpoint/2010/main">
-        <p14:section name="Ouverture" id="{8199beb8-673a-7d54-290a-7241b780232f}">
+        <p14:section name="Ouverture" id="{e1bd86bd-26e0-9abd-1136-8717da534b71}">
           <p14:sldIdLst>
             <p14:sldId id="256"/>
           </p14:sldIdLst>
         </p14:section>
-        <p14:section name="Découvrir" id="{58c7b21d-974d-8590-423a-e0e581b29d56}">
+        <p14:section name="Découvrir" id="{357b2ce2-55fb-4c05-e8d7-5c47821df9e7}">
           <p14:sldIdLst>
             <p14:sldId id="257"/>
             <p14:sldId id="258"/>
           </p14:sldIdLst>
         </p14:section>
-        <p14:section name="Comprendre" id="{e487cfb1-38b0-6c1f-fa88-3072ab892f34}">
+        <p14:section name="Comprendre" id="{5392e850-c5ba-5269-cd38-75be61118ff2}">
           <p14:sldIdLst>
             <p14:sldId id="259"/>
             <p14:sldId id="260"/>
@@ -160,7 +160,7 @@
             <p14:sldId id="269"/>
           </p14:sldIdLst>
         </p14:section>
-        <p14:section name="JIJ NU ! — Oefeningen" id="{188f9ded-916e-aaa7-beb6-e1599bfdb9e6}">
+        <p14:section name="JIJ NU ! — Oefeningen" id="{55bec5d1-7977-464a-13f0-4619dbd24086}">
           <p14:sldIdLst>
             <p14:sldId id="270"/>
             <p14:sldId id="271"/>
@@ -177,7 +177,7 @@
             <p14:sldId id="282"/>
           </p14:sldIdLst>
         </p14:section>
-        <p14:section name="Clôture" id="{87d85cc1-71cf-46e5-d114-31e4cd3f4073}">
+        <p14:section name="Clôture" id="{870a3e06-2660-ff31-362f-06ac1f5e3c4e}">
           <p14:sldIdLst>
             <p14:sldId id="283"/>
           </p14:sldIdLst>
